--- a/M&A/カンテサンス/アピシウス承継実績_1枚.pptx
+++ b/M&A/カンテサンス/アピシウス承継実績_1枚.pptx
@@ -502,7 +502,7 @@
           <a:p>
             <a:r>
               <a:rPr lang="en-US" dirty="0"/>
-              <a:t>アピシウス：2024年6月取得。創業40年超、39年間赤字が継続し40年目に黒字化した老舗フレンチ。取得後2年で売上+30%、利益+250%超。幹部メンバーは全員継続。サービス残業を撤廃し、12月を除き残業が発生しない体制を構築。店内の一部改装・修繕を実施。</a:t>
+              <a:t>アピシウス：2024年6月取得。東京・銀座、創業40年を超えるグランメゾン。39年間赤字が継続し40年目に黒字化。取得後2年で売上+30%、営業利益+250%超。幹部メンバーは全員継続。サービス残業を撤廃し、12月を除き残業が発生しない体制を構築。店内の一部改装・修繕を実施。</a:t>
             </a:r>
             <a:endParaRPr lang="en-US" dirty="0"/>
           </a:p>
@@ -901,7 +901,7 @@
                 <a:ea typeface="Calibri" pitchFamily="34" charset="-122"/>
                 <a:cs typeface="Calibri" pitchFamily="34" charset="-120"/>
               </a:rPr>
-              <a:t>TRACK RECORD　／　株式会社アピシウス（東京・有楽町）</a:t>
+              <a:t>TRACK RECORD　／　株式会社アピシウス（東京・銀座）</a:t>
             </a:r>
             <a:endParaRPr lang="en-US" sz="1100" dirty="0"/>
           </a:p>
@@ -982,7 +982,7 @@
                 <a:ea typeface="Calibri" pitchFamily="34" charset="-122"/>
                 <a:cs typeface="Calibri" pitchFamily="34" charset="-120"/>
               </a:rPr>
-              <a:t>2024年6月、創業40年を超え、39年間にわたり赤字が続いた老舗フレンチレストランを取得。2年間で売上30%増・利益250%超の増加を実現し、幹部メンバーは全員が継続しています。</a:t>
+              <a:t>2024年6月、創業40年を超えるグランメゾンを取得。39年間にわたり赤字が続き、40年目にようやく黒字化した店を引き継ぎ、2年間で売上30%増・営業利益250%超の増加を実現。幹部メンバーは全員が継続しています。</a:t>
             </a:r>
             <a:endParaRPr lang="en-US" sz="1250" dirty="0"/>
           </a:p>
@@ -1192,7 +1192,7 @@
                 <a:ea typeface="Calibri" pitchFamily="34" charset="-122"/>
                 <a:cs typeface="Calibri" pitchFamily="34" charset="-120"/>
               </a:rPr>
-              <a:t>利益</a:t>
+              <a:t>営業利益</a:t>
             </a:r>
             <a:endParaRPr lang="en-US" sz="1000" dirty="0"/>
           </a:p>
@@ -1829,7 +1829,7 @@
                           <a:ea typeface="Calibri" pitchFamily="34" charset="-122"/>
                           <a:cs typeface="Calibri" pitchFamily="34" charset="-120"/>
                         </a:rPr>
-                        <a:t>売上 ＋30%／利益 ＋250%超</a:t>
+                        <a:t>売上 ＋30%／営業利益 ＋250%超</a:t>
                       </a:r>
                       <a:endParaRPr lang="en-US" sz="1000" dirty="0">
                         <a:latin typeface="Calibri" charset="0"/>
@@ -3154,7 +3154,7 @@
                   <a:srgbClr val="FFFFFF"/>
                 </a:solidFill>
               </a:rPr>
-              <a:t>アピシウスで実証されたのは、収益改善の手法ではありません。「高級レストランは、引き継いでも壊れない」ということです。
+              <a:t>アピシウスで実証されたのは、収益改善の手法ではありません。「グランメゾンは、引き継いでも壊れない」ということです。
 </a:t>
             </a:r>
             <a:pPr indent="0" marL="0">
@@ -3169,7 +3169,7 @@
                   <a:srgbClr val="EBDCE1"/>
                 </a:solidFill>
               </a:rPr>
-              <a:t>カンテサンスに必要なのは再建ではなく承継です。当社は、高級レストランを実際に承継し、人を残し、労働環境を改善したうえで収益を伸ばした実績をもって、本件に臨みます。</a:t>
+              <a:t>カンテサンスに必要なのは再建ではなく承継です。当社は、グランメゾンを実際に承継し、人を残し、労働環境を改善したうえで収益を伸ばした実績をもって、本件に臨みます。</a:t>
             </a:r>
             <a:endParaRPr lang="en-US" sz="1250" dirty="0"/>
           </a:p>

--- a/M&A/カンテサンス/アピシウス承継実績_1枚.pptx
+++ b/M&A/カンテサンス/アピシウス承継実績_1枚.pptx
@@ -502,7 +502,7 @@
           <a:p>
             <a:r>
               <a:rPr lang="en-US" dirty="0"/>
-              <a:t>アピシウス：2024年6月取得。東京・銀座、創業40年を超えるグランメゾン。39年間赤字が継続し40年目に黒字化。取得後2年で売上+30%、営業利益+250%超。幹部メンバーは全員継続。サービス残業を撤廃し、12月を除き残業が発生しない体制を構築。店内の一部改装・修繕を実施。</a:t>
+              <a:t>アピシウス：2024年6月取得。東京・銀座、創業40年を超えるグランメゾン。39年間赤字が継続し40年目に黒字化。取得後2年で売上+30%、営業利益2.5倍超。幹部メンバーは全員継続。サービス残業を撤廃し、12月を除き残業が発生しない体制を構築。店内の一部改装・修繕を実施。</a:t>
             </a:r>
             <a:endParaRPr lang="en-US" dirty="0"/>
           </a:p>
@@ -982,7 +982,7 @@
                 <a:ea typeface="Calibri" pitchFamily="34" charset="-122"/>
                 <a:cs typeface="Calibri" pitchFamily="34" charset="-120"/>
               </a:rPr>
-              <a:t>2024年6月、創業40年を超えるグランメゾンを取得。39年間にわたり赤字が続き、40年目にようやく黒字化した店を引き継ぎ、2年間で売上30%増・営業利益250%超の増加を実現。幹部メンバーは全員が継続しています。</a:t>
+              <a:t>2024年6月、創業40年を超えるグランメゾンを取得。39年間にわたり赤字が続き、40年目にようやく黒字化した店を引き継ぎ、2年間で売上30%増・営業利益2.5倍超を実現。幹部メンバーは全員が継続しています。</a:t>
             </a:r>
             <a:endParaRPr lang="en-US" sz="1250" dirty="0"/>
           </a:p>
@@ -1231,7 +1231,7 @@
                 <a:ea typeface="Cambria" pitchFamily="34" charset="-122"/>
                 <a:cs typeface="Cambria" pitchFamily="34" charset="-120"/>
               </a:rPr>
-              <a:t>＋250%超</a:t>
+              <a:t>2.5倍超</a:t>
             </a:r>
             <a:endParaRPr lang="en-US" sz="3000" dirty="0"/>
           </a:p>
@@ -1829,7 +1829,7 @@
                           <a:ea typeface="Calibri" pitchFamily="34" charset="-122"/>
                           <a:cs typeface="Calibri" pitchFamily="34" charset="-120"/>
                         </a:rPr>
-                        <a:t>売上 ＋30%／営業利益 ＋250%超</a:t>
+                        <a:t>売上 ＋30%／営業利益 2.5倍超</a:t>
                       </a:r>
                       <a:endParaRPr lang="en-US" sz="1000" dirty="0">
                         <a:latin typeface="Calibri" charset="0"/>
